--- a/presentaciones/Cap02_El-delito.pptx
+++ b/presentaciones/Cap02_El-delito.pptx
@@ -7075,6 +7075,9 @@
           <a:lstStyle/>
           <a:p>
             <a:pPr indent="0" marL="0">
+              <a:lnSpc>
+                <a:spcPts val="3600"/>
+              </a:lnSpc>
               <a:buNone/>
             </a:pPr>
             <a:r>
@@ -7101,19 +7104,22 @@
         <p:spPr>
           <a:xfrm>
             <a:off x="868680" y="1298448"/>
-            <a:ext cx="10454335" cy="365760"/>
-          </a:xfrm>
-          <a:prstGeom prst="rect">
-            <a:avLst/>
-          </a:prstGeom>
-          <a:noFill/>
-          <a:ln/>
-        </p:spPr>
-        <p:txBody>
-          <a:bodyPr wrap="square" lIns="0" tIns="0" rIns="0" bIns="0" rtlCol="0" anchor="ctr"/>
-          <a:lstStyle/>
-          <a:p>
-            <a:pPr indent="0" marL="0">
+            <a:ext cx="10454335" cy="411480"/>
+          </a:xfrm>
+          <a:prstGeom prst="rect">
+            <a:avLst/>
+          </a:prstGeom>
+          <a:noFill/>
+          <a:ln/>
+        </p:spPr>
+        <p:txBody>
+          <a:bodyPr wrap="square" lIns="0" tIns="0" rIns="0" bIns="0" rtlCol="0" anchor="ctr"/>
+          <a:lstStyle/>
+          <a:p>
+            <a:pPr indent="0" marL="0">
+              <a:lnSpc>
+                <a:spcPts val="2000"/>
+              </a:lnSpc>
               <a:buNone/>
             </a:pPr>
             <a:r>
@@ -12789,6 +12795,9 @@
           <a:lstStyle/>
           <a:p>
             <a:pPr indent="0" marL="0">
+              <a:lnSpc>
+                <a:spcPts val="3600"/>
+              </a:lnSpc>
               <a:buNone/>
             </a:pPr>
             <a:r>
@@ -12815,19 +12824,22 @@
         <p:spPr>
           <a:xfrm>
             <a:off x="868680" y="1298448"/>
-            <a:ext cx="10454335" cy="365760"/>
-          </a:xfrm>
-          <a:prstGeom prst="rect">
-            <a:avLst/>
-          </a:prstGeom>
-          <a:noFill/>
-          <a:ln/>
-        </p:spPr>
-        <p:txBody>
-          <a:bodyPr wrap="square" lIns="0" tIns="0" rIns="0" bIns="0" rtlCol="0" anchor="ctr"/>
-          <a:lstStyle/>
-          <a:p>
-            <a:pPr indent="0" marL="0">
+            <a:ext cx="10454335" cy="411480"/>
+          </a:xfrm>
+          <a:prstGeom prst="rect">
+            <a:avLst/>
+          </a:prstGeom>
+          <a:noFill/>
+          <a:ln/>
+        </p:spPr>
+        <p:txBody>
+          <a:bodyPr wrap="square" lIns="0" tIns="0" rIns="0" bIns="0" rtlCol="0" anchor="ctr"/>
+          <a:lstStyle/>
+          <a:p>
+            <a:pPr indent="0" marL="0">
+              <a:lnSpc>
+                <a:spcPts val="2000"/>
+              </a:lnSpc>
               <a:buNone/>
             </a:pPr>
             <a:r>
@@ -13003,6 +13015,9 @@
           <a:lstStyle/>
           <a:p>
             <a:pPr indent="0" marL="0">
+              <a:lnSpc>
+                <a:spcPts val="3600"/>
+              </a:lnSpc>
               <a:buNone/>
             </a:pPr>
             <a:r>
@@ -13029,19 +13044,22 @@
         <p:spPr>
           <a:xfrm>
             <a:off x="868680" y="1298448"/>
-            <a:ext cx="10454335" cy="365760"/>
-          </a:xfrm>
-          <a:prstGeom prst="rect">
-            <a:avLst/>
-          </a:prstGeom>
-          <a:noFill/>
-          <a:ln/>
-        </p:spPr>
-        <p:txBody>
-          <a:bodyPr wrap="square" lIns="0" tIns="0" rIns="0" bIns="0" rtlCol="0" anchor="ctr"/>
-          <a:lstStyle/>
-          <a:p>
-            <a:pPr indent="0" marL="0">
+            <a:ext cx="10454335" cy="411480"/>
+          </a:xfrm>
+          <a:prstGeom prst="rect">
+            <a:avLst/>
+          </a:prstGeom>
+          <a:noFill/>
+          <a:ln/>
+        </p:spPr>
+        <p:txBody>
+          <a:bodyPr wrap="square" lIns="0" tIns="0" rIns="0" bIns="0" rtlCol="0" anchor="ctr"/>
+          <a:lstStyle/>
+          <a:p>
+            <a:pPr indent="0" marL="0">
+              <a:lnSpc>
+                <a:spcPts val="2000"/>
+              </a:lnSpc>
               <a:buNone/>
             </a:pPr>
             <a:r>
@@ -25050,6 +25068,9 @@
           <a:lstStyle/>
           <a:p>
             <a:pPr indent="0" marL="0">
+              <a:lnSpc>
+                <a:spcPts val="3600"/>
+              </a:lnSpc>
               <a:buNone/>
             </a:pPr>
             <a:r>
@@ -25225,6 +25246,9 @@
           <a:lstStyle/>
           <a:p>
             <a:pPr indent="0" marL="0">
+              <a:lnSpc>
+                <a:spcPts val="3600"/>
+              </a:lnSpc>
               <a:buNone/>
             </a:pPr>
             <a:r>

--- a/presentaciones/Cap02_El-delito.pptx
+++ b/presentaciones/Cap02_El-delito.pptx
@@ -7295,6 +7295,9 @@
           <a:lstStyle/>
           <a:p>
             <a:pPr indent="0" marL="0">
+              <a:lnSpc>
+                <a:spcPts val="4400"/>
+              </a:lnSpc>
               <a:buNone/>
             </a:pPr>
             <a:r>
@@ -8275,6 +8278,9 @@
           <a:lstStyle/>
           <a:p>
             <a:pPr indent="0" marL="0">
+              <a:lnSpc>
+                <a:spcPts val="4400"/>
+              </a:lnSpc>
               <a:buNone/>
             </a:pPr>
             <a:r>
@@ -10310,6 +10316,9 @@
           <a:lstStyle/>
           <a:p>
             <a:pPr indent="0" marL="0">
+              <a:lnSpc>
+                <a:spcPts val="4400"/>
+              </a:lnSpc>
               <a:buNone/>
             </a:pPr>
             <a:r>
@@ -10909,6 +10918,9 @@
           <a:lstStyle/>
           <a:p>
             <a:pPr indent="0" marL="0">
+              <a:lnSpc>
+                <a:spcPts val="4400"/>
+              </a:lnSpc>
               <a:buNone/>
             </a:pPr>
             <a:r>
@@ -11725,6 +11737,9 @@
           <a:lstStyle/>
           <a:p>
             <a:pPr indent="0" marL="0">
+              <a:lnSpc>
+                <a:spcPts val="4400"/>
+              </a:lnSpc>
               <a:buNone/>
             </a:pPr>
             <a:r>
@@ -14877,6 +14892,9 @@
           <a:lstStyle/>
           <a:p>
             <a:pPr indent="0" marL="0">
+              <a:lnSpc>
+                <a:spcPts val="4400"/>
+              </a:lnSpc>
               <a:buNone/>
             </a:pPr>
             <a:r>
@@ -16971,6 +16989,9 @@
           <a:lstStyle/>
           <a:p>
             <a:pPr indent="0" marL="0">
+              <a:lnSpc>
+                <a:spcPts val="4400"/>
+              </a:lnSpc>
               <a:buNone/>
             </a:pPr>
             <a:r>
@@ -18740,6 +18761,9 @@
           <a:lstStyle/>
           <a:p>
             <a:pPr indent="0" marL="0">
+              <a:lnSpc>
+                <a:spcPts val="4400"/>
+              </a:lnSpc>
               <a:buNone/>
             </a:pPr>
             <a:r>
@@ -20208,6 +20232,9 @@
           <a:lstStyle/>
           <a:p>
             <a:pPr indent="0" marL="0">
+              <a:lnSpc>
+                <a:spcPts val="4400"/>
+              </a:lnSpc>
               <a:buNone/>
             </a:pPr>
             <a:r>
@@ -21405,6 +21432,9 @@
           <a:lstStyle/>
           <a:p>
             <a:pPr indent="0" marL="0">
+              <a:lnSpc>
+                <a:spcPts val="4400"/>
+              </a:lnSpc>
               <a:buNone/>
             </a:pPr>
             <a:r>
@@ -23399,6 +23429,9 @@
           <a:lstStyle/>
           <a:p>
             <a:pPr indent="0" marL="0">
+              <a:lnSpc>
+                <a:spcPts val="4400"/>
+              </a:lnSpc>
               <a:buNone/>
             </a:pPr>
             <a:r>
